--- a/Reporte 240726.pptx
+++ b/Reporte 240726.pptx
@@ -5,7 +5,7 @@
     <p:sldMasterId id="2147483672" r:id="rId1"/>
   </p:sldMasterIdLst>
   <p:notesMasterIdLst>
-    <p:notesMasterId r:id="rId20"/>
+    <p:notesMasterId r:id="rId18"/>
   </p:notesMasterIdLst>
   <p:sldIdLst>
     <p:sldId id="350" r:id="rId2"/>
@@ -22,26 +22,24 @@
     <p:sldId id="369" r:id="rId13"/>
     <p:sldId id="361" r:id="rId14"/>
     <p:sldId id="371" r:id="rId15"/>
-    <p:sldId id="400" r:id="rId16"/>
-    <p:sldId id="409" r:id="rId17"/>
-    <p:sldId id="410" r:id="rId18"/>
-    <p:sldId id="280" r:id="rId19"/>
+    <p:sldId id="410" r:id="rId16"/>
+    <p:sldId id="280" r:id="rId17"/>
   </p:sldIdLst>
   <p:sldSz cx="9144000" cy="5143500" type="screen16x9"/>
   <p:notesSz cx="6858000" cy="9144000"/>
   <p:embeddedFontLst>
     <p:embeddedFont>
       <p:font typeface="Montserrat" panose="00000500000000000000" pitchFamily="2" charset="0"/>
-      <p:regular r:id="rId21"/>
-      <p:bold r:id="rId22"/>
-      <p:italic r:id="rId23"/>
-      <p:boldItalic r:id="rId24"/>
+      <p:regular r:id="rId19"/>
+      <p:bold r:id="rId20"/>
+      <p:italic r:id="rId21"/>
+      <p:boldItalic r:id="rId22"/>
     </p:embeddedFont>
     <p:embeddedFont>
       <p:font typeface="Montserrat Black" panose="00000A00000000000000" pitchFamily="2" charset="0"/>
-      <p:bold r:id="rId25"/>
-      <p:italic r:id="rId26"/>
-      <p:boldItalic r:id="rId27"/>
+      <p:bold r:id="rId23"/>
+      <p:italic r:id="rId24"/>
+      <p:boldItalic r:id="rId25"/>
     </p:embeddedFont>
   </p:embeddedFontLst>
   <p:defaultTextStyle>
@@ -6422,31 +6420,7 @@
                 <a:latin typeface="Montserrat Black"/>
                 <a:sym typeface="Arial"/>
               </a:rPr>
-              <a:t>Elaborado: 2</a:t>
-            </a:r>
-            <a:r>
-              <a:rPr lang="es-MX" sz="1600" dirty="0">
-                <a:solidFill>
-                  <a:srgbClr val="D8AB72"/>
-                </a:solidFill>
-              </a:rPr>
-              <a:t>3</a:t>
-            </a:r>
-            <a:r>
-              <a:rPr kumimoji="0" lang="es-MX" sz="1600" b="0" i="0" u="none" strike="noStrike" kern="0" cap="none" spc="0" normalizeH="0" baseline="0" noProof="0" dirty="0">
-                <a:ln>
-                  <a:noFill/>
-                </a:ln>
-                <a:solidFill>
-                  <a:srgbClr val="D8AB72"/>
-                </a:solidFill>
-                <a:effectLst/>
-                <a:uLnTx/>
-                <a:uFillTx/>
-                <a:latin typeface="Montserrat Black"/>
-                <a:sym typeface="Arial"/>
-              </a:rPr>
-              <a:t> de julio</a:t>
+              <a:t>Elaborado: 24 de julio</a:t>
             </a:r>
             <a:endParaRPr lang="es-MX" sz="1600" dirty="0">
               <a:solidFill>
@@ -6569,10 +6543,10 @@
       </p:sp>
       <p:pic>
         <p:nvPicPr>
-          <p:cNvPr id="4" name="Imagen 3">
+          <p:cNvPr id="5" name="Imagen 4">
             <a:extLst>
               <a:ext uri="{FF2B5EF4-FFF2-40B4-BE49-F238E27FC236}">
-                <a16:creationId xmlns:a16="http://schemas.microsoft.com/office/drawing/2014/main" id="{AFA45A8E-692D-22A1-896C-1B0BA3BD8222}"/>
+                <a16:creationId xmlns:a16="http://schemas.microsoft.com/office/drawing/2014/main" id="{251CAB75-5DA5-F17A-30C0-3ED7806308BF}"/>
               </a:ext>
             </a:extLst>
           </p:cNvPr>
@@ -6589,8 +6563,8 @@
         </p:blipFill>
         <p:spPr>
           <a:xfrm>
-            <a:off x="0" y="888406"/>
-            <a:ext cx="9144000" cy="3509564"/>
+            <a:off x="-6725" y="998955"/>
+            <a:ext cx="9144000" cy="3404789"/>
           </a:xfrm>
           <a:prstGeom prst="rect">
             <a:avLst/>
@@ -6667,10 +6641,10 @@
       </p:sp>
       <p:pic>
         <p:nvPicPr>
-          <p:cNvPr id="4" name="Imagen 3">
+          <p:cNvPr id="3" name="Imagen 2">
             <a:extLst>
               <a:ext uri="{FF2B5EF4-FFF2-40B4-BE49-F238E27FC236}">
-                <a16:creationId xmlns:a16="http://schemas.microsoft.com/office/drawing/2014/main" id="{5E98766B-1CDD-6D62-4C6D-EC00DF04B01D}"/>
+                <a16:creationId xmlns:a16="http://schemas.microsoft.com/office/drawing/2014/main" id="{7A12F929-F2AE-A43B-EEAC-ACEC23677293}"/>
               </a:ext>
             </a:extLst>
           </p:cNvPr>
@@ -6687,8 +6661,8 @@
         </p:blipFill>
         <p:spPr>
           <a:xfrm>
-            <a:off x="0" y="1353584"/>
-            <a:ext cx="9144000" cy="2579207"/>
+            <a:off x="-6725" y="1352479"/>
+            <a:ext cx="9144000" cy="2581418"/>
           </a:xfrm>
           <a:prstGeom prst="rect">
             <a:avLst/>
@@ -6771,10 +6745,10 @@
       </p:sp>
       <p:pic>
         <p:nvPicPr>
-          <p:cNvPr id="4" name="Imagen 3">
+          <p:cNvPr id="3" name="Imagen 2">
             <a:extLst>
               <a:ext uri="{FF2B5EF4-FFF2-40B4-BE49-F238E27FC236}">
-                <a16:creationId xmlns:a16="http://schemas.microsoft.com/office/drawing/2014/main" id="{21FBA60C-D9A9-DD0E-56BF-A998E852D026}"/>
+                <a16:creationId xmlns:a16="http://schemas.microsoft.com/office/drawing/2014/main" id="{BA403DB7-C9E3-5DAC-63E4-E9D2CF54A627}"/>
               </a:ext>
             </a:extLst>
           </p:cNvPr>
@@ -6791,8 +6765,8 @@
         </p:blipFill>
         <p:spPr>
           <a:xfrm>
-            <a:off x="0" y="698658"/>
-            <a:ext cx="9144000" cy="3889059"/>
+            <a:off x="0" y="826411"/>
+            <a:ext cx="9144000" cy="3633554"/>
           </a:xfrm>
           <a:prstGeom prst="rect">
             <a:avLst/>
@@ -6869,10 +6843,10 @@
       </p:sp>
       <p:pic>
         <p:nvPicPr>
-          <p:cNvPr id="4" name="Imagen 3">
+          <p:cNvPr id="5" name="Imagen 4">
             <a:extLst>
               <a:ext uri="{FF2B5EF4-FFF2-40B4-BE49-F238E27FC236}">
-                <a16:creationId xmlns:a16="http://schemas.microsoft.com/office/drawing/2014/main" id="{334748CC-854A-96AA-88E6-56DF35594093}"/>
+                <a16:creationId xmlns:a16="http://schemas.microsoft.com/office/drawing/2014/main" id="{FA66E44C-1617-51DF-A2B7-DCCB4E32D774}"/>
               </a:ext>
             </a:extLst>
           </p:cNvPr>
@@ -6889,8 +6863,8 @@
         </p:blipFill>
         <p:spPr>
           <a:xfrm>
-            <a:off x="0" y="1296847"/>
-            <a:ext cx="9144000" cy="2692681"/>
+            <a:off x="0" y="1357550"/>
+            <a:ext cx="9144000" cy="2571275"/>
           </a:xfrm>
           <a:prstGeom prst="rect">
             <a:avLst/>
@@ -6967,10 +6941,10 @@
       </p:sp>
       <p:pic>
         <p:nvPicPr>
-          <p:cNvPr id="4" name="Imagen 3">
+          <p:cNvPr id="3" name="Imagen 2">
             <a:extLst>
               <a:ext uri="{FF2B5EF4-FFF2-40B4-BE49-F238E27FC236}">
-                <a16:creationId xmlns:a16="http://schemas.microsoft.com/office/drawing/2014/main" id="{D287D2FB-B3E7-5C83-38B7-4BF41F6DAF49}"/>
+                <a16:creationId xmlns:a16="http://schemas.microsoft.com/office/drawing/2014/main" id="{2190AF2E-0ECB-B794-3212-F8FA1CFEDD67}"/>
               </a:ext>
             </a:extLst>
           </p:cNvPr>
@@ -6987,8 +6961,8 @@
         </p:blipFill>
         <p:spPr>
           <a:xfrm>
-            <a:off x="-1" y="639756"/>
-            <a:ext cx="9144000" cy="4006864"/>
+            <a:off x="-1" y="700404"/>
+            <a:ext cx="9144000" cy="3885567"/>
           </a:xfrm>
           <a:prstGeom prst="rect">
             <a:avLst/>
@@ -7009,208 +6983,6 @@
 </file>
 
 <file path=ppt/slides/slide15.xml><?xml version="1.0" encoding="utf-8"?>
-<p:sld xmlns:a="http://schemas.openxmlformats.org/drawingml/2006/main" xmlns:r="http://schemas.openxmlformats.org/officeDocument/2006/relationships" xmlns:p="http://schemas.openxmlformats.org/presentationml/2006/main">
-  <p:cSld>
-    <p:spTree>
-      <p:nvGrpSpPr>
-        <p:cNvPr id="1" name=""/>
-        <p:cNvGrpSpPr/>
-        <p:nvPr/>
-      </p:nvGrpSpPr>
-      <p:grpSpPr>
-        <a:xfrm>
-          <a:off x="0" y="0"/>
-          <a:ext cx="0" cy="0"/>
-          <a:chOff x="0" y="0"/>
-          <a:chExt cx="0" cy="0"/>
-        </a:xfrm>
-      </p:grpSpPr>
-      <p:sp>
-        <p:nvSpPr>
-          <p:cNvPr id="5" name="CuadroTexto 4">
-            <a:extLst>
-              <a:ext uri="{FF2B5EF4-FFF2-40B4-BE49-F238E27FC236}">
-                <a16:creationId xmlns:a16="http://schemas.microsoft.com/office/drawing/2014/main" id="{A7C59986-F48B-C2F8-8717-714125E0D234}"/>
-              </a:ext>
-            </a:extLst>
-          </p:cNvPr>
-          <p:cNvSpPr txBox="1"/>
-          <p:nvPr/>
-        </p:nvSpPr>
-        <p:spPr>
-          <a:xfrm>
-            <a:off x="1926166" y="88135"/>
-            <a:ext cx="5291667" cy="307777"/>
-          </a:xfrm>
-          <a:prstGeom prst="rect">
-            <a:avLst/>
-          </a:prstGeom>
-          <a:noFill/>
-        </p:spPr>
-        <p:txBody>
-          <a:bodyPr wrap="square" rtlCol="0">
-            <a:spAutoFit/>
-          </a:bodyPr>
-          <a:lstStyle/>
-          <a:p>
-            <a:pPr algn="ctr"/>
-            <a:r>
-              <a:rPr lang="es-MX" b="1" dirty="0">
-                <a:latin typeface="Montserrat" pitchFamily="2" charset="0"/>
-              </a:rPr>
-              <a:t>Opinión emitida por radioescuchas</a:t>
-            </a:r>
-          </a:p>
-        </p:txBody>
-      </p:sp>
-      <p:pic>
-        <p:nvPicPr>
-          <p:cNvPr id="4" name="Imagen 3">
-            <a:extLst>
-              <a:ext uri="{FF2B5EF4-FFF2-40B4-BE49-F238E27FC236}">
-                <a16:creationId xmlns:a16="http://schemas.microsoft.com/office/drawing/2014/main" id="{B67F3386-9BC1-6472-32F7-EB464F1AD7D9}"/>
-              </a:ext>
-            </a:extLst>
-          </p:cNvPr>
-          <p:cNvPicPr>
-            <a:picLocks noChangeAspect="1"/>
-          </p:cNvPicPr>
-          <p:nvPr/>
-        </p:nvPicPr>
-        <p:blipFill>
-          <a:blip r:embed="rId2"/>
-          <a:stretch>
-            <a:fillRect/>
-          </a:stretch>
-        </p:blipFill>
-        <p:spPr>
-          <a:xfrm>
-            <a:off x="0" y="1605048"/>
-            <a:ext cx="9144000" cy="1933403"/>
-          </a:xfrm>
-          <a:prstGeom prst="rect">
-            <a:avLst/>
-          </a:prstGeom>
-        </p:spPr>
-      </p:pic>
-    </p:spTree>
-    <p:extLst>
-      <p:ext uri="{BB962C8B-B14F-4D97-AF65-F5344CB8AC3E}">
-        <p14:creationId xmlns:p14="http://schemas.microsoft.com/office/powerpoint/2010/main" val="2614820817"/>
-      </p:ext>
-    </p:extLst>
-  </p:cSld>
-  <p:clrMapOvr>
-    <a:masterClrMapping/>
-  </p:clrMapOvr>
-</p:sld>
-</file>
-
-<file path=ppt/slides/slide16.xml><?xml version="1.0" encoding="utf-8"?>
-<p:sld xmlns:a="http://schemas.openxmlformats.org/drawingml/2006/main" xmlns:r="http://schemas.openxmlformats.org/officeDocument/2006/relationships" xmlns:p="http://schemas.openxmlformats.org/presentationml/2006/main">
-  <p:cSld>
-    <p:spTree>
-      <p:nvGrpSpPr>
-        <p:cNvPr id="1" name="">
-          <a:extLst>
-            <a:ext uri="{FF2B5EF4-FFF2-40B4-BE49-F238E27FC236}">
-              <a16:creationId xmlns:a16="http://schemas.microsoft.com/office/drawing/2014/main" id="{0A58F33B-D4C2-69B9-41F6-41C84D7C6447}"/>
-            </a:ext>
-          </a:extLst>
-        </p:cNvPr>
-        <p:cNvGrpSpPr/>
-        <p:nvPr/>
-      </p:nvGrpSpPr>
-      <p:grpSpPr>
-        <a:xfrm>
-          <a:off x="0" y="0"/>
-          <a:ext cx="0" cy="0"/>
-          <a:chOff x="0" y="0"/>
-          <a:chExt cx="0" cy="0"/>
-        </a:xfrm>
-      </p:grpSpPr>
-      <p:sp>
-        <p:nvSpPr>
-          <p:cNvPr id="5" name="CuadroTexto 4">
-            <a:extLst>
-              <a:ext uri="{FF2B5EF4-FFF2-40B4-BE49-F238E27FC236}">
-                <a16:creationId xmlns:a16="http://schemas.microsoft.com/office/drawing/2014/main" id="{297EF713-3931-DE0E-C995-210D06FA1D20}"/>
-              </a:ext>
-            </a:extLst>
-          </p:cNvPr>
-          <p:cNvSpPr txBox="1"/>
-          <p:nvPr/>
-        </p:nvSpPr>
-        <p:spPr>
-          <a:xfrm>
-            <a:off x="1926166" y="88135"/>
-            <a:ext cx="5291667" cy="307777"/>
-          </a:xfrm>
-          <a:prstGeom prst="rect">
-            <a:avLst/>
-          </a:prstGeom>
-          <a:noFill/>
-        </p:spPr>
-        <p:txBody>
-          <a:bodyPr wrap="square" rtlCol="0">
-            <a:spAutoFit/>
-          </a:bodyPr>
-          <a:lstStyle/>
-          <a:p>
-            <a:pPr algn="ctr"/>
-            <a:r>
-              <a:rPr lang="es-MX" b="1" dirty="0">
-                <a:latin typeface="Montserrat" pitchFamily="2" charset="0"/>
-              </a:rPr>
-              <a:t>Opinión emitida por radioescuchas</a:t>
-            </a:r>
-          </a:p>
-        </p:txBody>
-      </p:sp>
-      <p:pic>
-        <p:nvPicPr>
-          <p:cNvPr id="4" name="Imagen 3">
-            <a:extLst>
-              <a:ext uri="{FF2B5EF4-FFF2-40B4-BE49-F238E27FC236}">
-                <a16:creationId xmlns:a16="http://schemas.microsoft.com/office/drawing/2014/main" id="{E5B7BC87-7F62-9B4C-DCB9-DAEAF479CC90}"/>
-              </a:ext>
-            </a:extLst>
-          </p:cNvPr>
-          <p:cNvPicPr>
-            <a:picLocks noChangeAspect="1"/>
-          </p:cNvPicPr>
-          <p:nvPr/>
-        </p:nvPicPr>
-        <p:blipFill>
-          <a:blip r:embed="rId2"/>
-          <a:stretch>
-            <a:fillRect/>
-          </a:stretch>
-        </p:blipFill>
-        <p:spPr>
-          <a:xfrm>
-            <a:off x="1903277" y="623784"/>
-            <a:ext cx="5264421" cy="4038808"/>
-          </a:xfrm>
-          <a:prstGeom prst="rect">
-            <a:avLst/>
-          </a:prstGeom>
-        </p:spPr>
-      </p:pic>
-    </p:spTree>
-    <p:extLst>
-      <p:ext uri="{BB962C8B-B14F-4D97-AF65-F5344CB8AC3E}">
-        <p14:creationId xmlns:p14="http://schemas.microsoft.com/office/powerpoint/2010/main" val="495306255"/>
-      </p:ext>
-    </p:extLst>
-  </p:cSld>
-  <p:clrMapOvr>
-    <a:masterClrMapping/>
-  </p:clrMapOvr>
-</p:sld>
-</file>
-
-<file path=ppt/slides/slide17.xml><?xml version="1.0" encoding="utf-8"?>
 <p:sld xmlns:a="http://schemas.openxmlformats.org/drawingml/2006/main" xmlns:r="http://schemas.openxmlformats.org/officeDocument/2006/relationships" xmlns:p="http://schemas.openxmlformats.org/presentationml/2006/main">
   <p:cSld>
     <p:spTree>
@@ -7273,10 +7045,10 @@
       </p:sp>
       <p:pic>
         <p:nvPicPr>
-          <p:cNvPr id="3" name="Imagen 2">
+          <p:cNvPr id="4" name="Imagen 3">
             <a:extLst>
               <a:ext uri="{FF2B5EF4-FFF2-40B4-BE49-F238E27FC236}">
-                <a16:creationId xmlns:a16="http://schemas.microsoft.com/office/drawing/2014/main" id="{DF305EB8-65BA-5644-DA77-9CCB6488A342}"/>
+                <a16:creationId xmlns:a16="http://schemas.microsoft.com/office/drawing/2014/main" id="{2AD42CBC-2D84-2E95-FBAE-293638C806BE}"/>
               </a:ext>
             </a:extLst>
           </p:cNvPr>
@@ -7293,8 +7065,8 @@
         </p:blipFill>
         <p:spPr>
           <a:xfrm>
-            <a:off x="726934" y="679221"/>
-            <a:ext cx="7810901" cy="4464279"/>
+            <a:off x="0" y="1117486"/>
+            <a:ext cx="9144000" cy="2908527"/>
           </a:xfrm>
           <a:prstGeom prst="rect">
             <a:avLst/>
@@ -7314,7 +7086,7 @@
 </p:sld>
 </file>
 
-<file path=ppt/slides/slide18.xml><?xml version="1.0" encoding="utf-8"?>
+<file path=ppt/slides/slide16.xml><?xml version="1.0" encoding="utf-8"?>
 <p:sld xmlns:a="http://schemas.openxmlformats.org/drawingml/2006/main" xmlns:r="http://schemas.openxmlformats.org/officeDocument/2006/relationships" xmlns:p="http://schemas.openxmlformats.org/presentationml/2006/main">
   <p:cSld>
     <p:spTree>
@@ -7447,10 +7219,10 @@
       </p:sp>
       <p:pic>
         <p:nvPicPr>
-          <p:cNvPr id="8" name="Imagen 7">
+          <p:cNvPr id="5" name="Imagen 4">
             <a:extLst>
               <a:ext uri="{FF2B5EF4-FFF2-40B4-BE49-F238E27FC236}">
-                <a16:creationId xmlns:a16="http://schemas.microsoft.com/office/drawing/2014/main" id="{9627C7B3-BEFE-AF6A-67D5-DD11DC14A8B5}"/>
+                <a16:creationId xmlns:a16="http://schemas.microsoft.com/office/drawing/2014/main" id="{BCF93B33-039F-FBE0-0FE8-23E669846891}"/>
               </a:ext>
             </a:extLst>
           </p:cNvPr>
@@ -7467,8 +7239,8 @@
         </p:blipFill>
         <p:spPr>
           <a:xfrm>
-            <a:off x="0" y="523220"/>
-            <a:ext cx="9144000" cy="4239039"/>
+            <a:off x="0" y="959156"/>
+            <a:ext cx="9144000" cy="3368064"/>
           </a:xfrm>
           <a:prstGeom prst="rect">
             <a:avLst/>
@@ -7561,10 +7333,10 @@
       </p:sp>
       <p:pic>
         <p:nvPicPr>
-          <p:cNvPr id="4" name="Imagen 3">
+          <p:cNvPr id="3" name="Imagen 2">
             <a:extLst>
               <a:ext uri="{FF2B5EF4-FFF2-40B4-BE49-F238E27FC236}">
-                <a16:creationId xmlns:a16="http://schemas.microsoft.com/office/drawing/2014/main" id="{D913BF4A-AB1A-6E8B-92A3-C27BBA96EEC1}"/>
+                <a16:creationId xmlns:a16="http://schemas.microsoft.com/office/drawing/2014/main" id="{F97368CE-33AB-2516-42F0-5FEDE5C1FBEC}"/>
               </a:ext>
             </a:extLst>
           </p:cNvPr>
@@ -7581,8 +7353,8 @@
         </p:blipFill>
         <p:spPr>
           <a:xfrm>
-            <a:off x="0" y="1092553"/>
-            <a:ext cx="9144000" cy="3101269"/>
+            <a:off x="0" y="1405971"/>
+            <a:ext cx="9144000" cy="2474434"/>
           </a:xfrm>
           <a:prstGeom prst="rect">
             <a:avLst/>
@@ -7675,10 +7447,10 @@
       </p:sp>
       <p:pic>
         <p:nvPicPr>
-          <p:cNvPr id="4" name="Imagen 3">
+          <p:cNvPr id="2" name="Imagen 1">
             <a:extLst>
               <a:ext uri="{FF2B5EF4-FFF2-40B4-BE49-F238E27FC236}">
-                <a16:creationId xmlns:a16="http://schemas.microsoft.com/office/drawing/2014/main" id="{42CF7F45-F47D-D2BD-2AF9-41EB926CA7FA}"/>
+                <a16:creationId xmlns:a16="http://schemas.microsoft.com/office/drawing/2014/main" id="{6A48C07B-E9D1-B14A-4FB1-792F5FAB20CD}"/>
               </a:ext>
             </a:extLst>
           </p:cNvPr>
@@ -7695,8 +7467,8 @@
         </p:blipFill>
         <p:spPr>
           <a:xfrm>
-            <a:off x="1061650" y="598458"/>
-            <a:ext cx="6947676" cy="4448454"/>
+            <a:off x="550382" y="634658"/>
+            <a:ext cx="7970212" cy="4017060"/>
           </a:xfrm>
           <a:prstGeom prst="rect">
             <a:avLst/>
@@ -7785,10 +7557,10 @@
       </p:sp>
       <p:pic>
         <p:nvPicPr>
-          <p:cNvPr id="3" name="Imagen 2">
+          <p:cNvPr id="4" name="Imagen 3">
             <a:extLst>
               <a:ext uri="{FF2B5EF4-FFF2-40B4-BE49-F238E27FC236}">
-                <a16:creationId xmlns:a16="http://schemas.microsoft.com/office/drawing/2014/main" id="{31555C00-5759-E11E-88AF-CA66D7C5589F}"/>
+                <a16:creationId xmlns:a16="http://schemas.microsoft.com/office/drawing/2014/main" id="{DD057D6D-BC62-A4A7-0F1F-A6A2DD632A63}"/>
               </a:ext>
             </a:extLst>
           </p:cNvPr>
@@ -7805,8 +7577,8 @@
         </p:blipFill>
         <p:spPr>
           <a:xfrm>
-            <a:off x="1051616" y="658594"/>
-            <a:ext cx="6967741" cy="3969187"/>
+            <a:off x="599520" y="661721"/>
+            <a:ext cx="7944959" cy="3820058"/>
           </a:xfrm>
           <a:prstGeom prst="rect">
             <a:avLst/>
@@ -7899,10 +7671,10 @@
       </p:sp>
       <p:pic>
         <p:nvPicPr>
-          <p:cNvPr id="3" name="Imagen 2">
+          <p:cNvPr id="4" name="Imagen 3">
             <a:extLst>
               <a:ext uri="{FF2B5EF4-FFF2-40B4-BE49-F238E27FC236}">
-                <a16:creationId xmlns:a16="http://schemas.microsoft.com/office/drawing/2014/main" id="{B8BF90E2-2743-48B1-CFAC-BE54EDFF611E}"/>
+                <a16:creationId xmlns:a16="http://schemas.microsoft.com/office/drawing/2014/main" id="{CDA22620-4225-7ABD-D1C1-E122F01F932A}"/>
               </a:ext>
             </a:extLst>
           </p:cNvPr>
@@ -7919,8 +7691,8 @@
         </p:blipFill>
         <p:spPr>
           <a:xfrm>
-            <a:off x="0" y="527076"/>
-            <a:ext cx="9144000" cy="4232223"/>
+            <a:off x="0" y="999442"/>
+            <a:ext cx="9144000" cy="3389416"/>
           </a:xfrm>
           <a:prstGeom prst="rect">
             <a:avLst/>
@@ -8013,10 +7785,10 @@
       </p:sp>
       <p:pic>
         <p:nvPicPr>
-          <p:cNvPr id="3" name="Imagen 2">
+          <p:cNvPr id="2" name="Imagen 1">
             <a:extLst>
               <a:ext uri="{FF2B5EF4-FFF2-40B4-BE49-F238E27FC236}">
-                <a16:creationId xmlns:a16="http://schemas.microsoft.com/office/drawing/2014/main" id="{62614245-C67A-D81E-96F7-E15646FD6B12}"/>
+                <a16:creationId xmlns:a16="http://schemas.microsoft.com/office/drawing/2014/main" id="{0BF1F805-93D5-B868-422D-D3B86101F8C5}"/>
               </a:ext>
             </a:extLst>
           </p:cNvPr>
@@ -8033,8 +7805,8 @@
         </p:blipFill>
         <p:spPr>
           <a:xfrm>
-            <a:off x="1082217" y="589831"/>
-            <a:ext cx="6906541" cy="4422116"/>
+            <a:off x="543239" y="631058"/>
+            <a:ext cx="7984497" cy="4024260"/>
           </a:xfrm>
           <a:prstGeom prst="rect">
             <a:avLst/>
@@ -8127,10 +7899,10 @@
       </p:sp>
       <p:pic>
         <p:nvPicPr>
-          <p:cNvPr id="3" name="Imagen 2">
+          <p:cNvPr id="2" name="Imagen 1">
             <a:extLst>
               <a:ext uri="{FF2B5EF4-FFF2-40B4-BE49-F238E27FC236}">
-                <a16:creationId xmlns:a16="http://schemas.microsoft.com/office/drawing/2014/main" id="{1D0FDBD4-92DB-50A1-10A1-4364C7712BE3}"/>
+                <a16:creationId xmlns:a16="http://schemas.microsoft.com/office/drawing/2014/main" id="{6EBC502C-33C7-91B4-B835-8F13F053EFB9}"/>
               </a:ext>
             </a:extLst>
           </p:cNvPr>
@@ -8147,8 +7919,8 @@
         </p:blipFill>
         <p:spPr>
           <a:xfrm>
-            <a:off x="964947" y="523220"/>
-            <a:ext cx="7141082" cy="4572288"/>
+            <a:off x="1106488" y="914940"/>
+            <a:ext cx="6858000" cy="3456495"/>
           </a:xfrm>
           <a:prstGeom prst="rect">
             <a:avLst/>
@@ -8237,10 +8009,10 @@
       </p:sp>
       <p:pic>
         <p:nvPicPr>
-          <p:cNvPr id="4" name="Imagen 3">
+          <p:cNvPr id="3" name="Imagen 2">
             <a:extLst>
               <a:ext uri="{FF2B5EF4-FFF2-40B4-BE49-F238E27FC236}">
-                <a16:creationId xmlns:a16="http://schemas.microsoft.com/office/drawing/2014/main" id="{ECA9E906-3164-EB4C-52E4-4B36F2651EDC}"/>
+                <a16:creationId xmlns:a16="http://schemas.microsoft.com/office/drawing/2014/main" id="{EA0F26D3-DA5E-C3C3-EA6B-329D5302413C}"/>
               </a:ext>
             </a:extLst>
           </p:cNvPr>
@@ -8257,8 +8029,8 @@
         </p:blipFill>
         <p:spPr>
           <a:xfrm>
-            <a:off x="1034868" y="1111175"/>
-            <a:ext cx="7074264" cy="2921150"/>
+            <a:off x="0" y="1544727"/>
+            <a:ext cx="9144000" cy="2054045"/>
           </a:xfrm>
           <a:prstGeom prst="rect">
             <a:avLst/>
